--- a/Разработка информационной системы.pptx
+++ b/Разработка информационной системы.pptx
@@ -226,7 +226,7 @@
             <a:pPr rtl="0"/>
             <a:fld id="{8BF404C6-F3CC-4383-8FBC-3F7F856D112C}" type="datetime1">
               <a:rPr lang="ru-RU" smtClean="0"/>
-              <a:t>30.03.2026</a:t>
+              <a:t>31.03.2026</a:t>
             </a:fld>
             <a:endParaRPr lang="ru-RU" dirty="0"/>
           </a:p>
@@ -396,7 +396,7 @@
             <a:fld id="{8BE53AFD-DFF1-40C5-A030-1B2F2E9C0365}" type="datetime1">
               <a:rPr lang="ru-RU" smtClean="0"/>
               <a:pPr/>
-              <a:t>30.03.2026</a:t>
+              <a:t>31.03.2026</a:t>
             </a:fld>
             <a:endParaRPr lang="ru-RU" dirty="0"/>
           </a:p>
@@ -17632,7 +17632,7 @@
             <a:pPr rtl="0"/>
             <a:fld id="{2A4B3A73-9DD3-4028-87DB-C033F5E3B44F}" type="datetime1">
               <a:rPr lang="ru-RU" noProof="0" smtClean="0"/>
-              <a:t>30.03.2026</a:t>
+              <a:t>31.03.2026</a:t>
             </a:fld>
             <a:endParaRPr lang="ru-RU" noProof="0"/>
           </a:p>
@@ -19746,8 +19746,8 @@
         </p:nvSpPr>
         <p:spPr>
           <a:xfrm>
-            <a:off x="443366" y="187367"/>
-            <a:ext cx="4937211" cy="1325563"/>
+            <a:off x="443366" y="104775"/>
+            <a:ext cx="7109959" cy="701852"/>
           </a:xfrm>
         </p:spPr>
         <p:txBody>
@@ -19763,9 +19763,6 @@
               <a:rPr lang="ru-RU" dirty="0" err="1"/>
               <a:t>ао</a:t>
             </a:r>
-            <a:br>
-              <a:rPr lang="ru-RU" dirty="0"/>
-            </a:br>
             <a:endParaRPr lang="ru-RU" dirty="0"/>
           </a:p>
         </p:txBody>
@@ -19803,10 +19800,10 @@
       </p:sp>
       <p:pic>
         <p:nvPicPr>
-          <p:cNvPr id="3" name="Рисунок 2">
-            <a:extLst>
-              <a:ext uri="{FF2B5EF4-FFF2-40B4-BE49-F238E27FC236}">
-                <a16:creationId xmlns:a16="http://schemas.microsoft.com/office/drawing/2014/main" id="{0602EFC6-377C-26EA-7D69-E701F867AEFB}"/>
+          <p:cNvPr id="6" name="Рисунок 5">
+            <a:extLst>
+              <a:ext uri="{FF2B5EF4-FFF2-40B4-BE49-F238E27FC236}">
+                <a16:creationId xmlns:a16="http://schemas.microsoft.com/office/drawing/2014/main" id="{C710D3E9-D530-7A6C-793E-DF0749A5DA32}"/>
               </a:ext>
             </a:extLst>
           </p:cNvPr>
@@ -19823,8 +19820,8 @@
         </p:blipFill>
         <p:spPr>
           <a:xfrm>
-            <a:off x="443366" y="1000676"/>
-            <a:ext cx="10570761" cy="5758092"/>
+            <a:off x="0" y="987601"/>
+            <a:ext cx="12192000" cy="6063897"/>
           </a:xfrm>
           <a:prstGeom prst="rect">
             <a:avLst/>
@@ -21548,14 +21545,6 @@
 </file>
 
 <file path=customXml/item1.xml><?xml version="1.0" encoding="utf-8"?>
-<p:properties xmlns:p="http://schemas.microsoft.com/office/2006/metadata/properties" xmlns:xsi="http://www.w3.org/2001/XMLSchema-instance" xmlns:pc="http://schemas.microsoft.com/office/infopath/2007/PartnerControls">
-  <documentManagement>
-    <MediaServiceKeyPoints xmlns="71af3243-3dd4-4a8d-8c0d-dd76da1f02a5" xsi:nil="true"/>
-  </documentManagement>
-</p:properties>
-</file>
-
-<file path=customXml/item2.xml><?xml version="1.0" encoding="utf-8"?>
 <ct:contentTypeSchema xmlns:ct="http://schemas.microsoft.com/office/2006/metadata/contentType" xmlns:ma="http://schemas.microsoft.com/office/2006/metadata/properties/metaAttributes" ct:_="" ma:_="" ma:contentTypeName="Document" ma:contentTypeID="0x01010079F111ED35F8CC479449609E8A0923A6" ma:contentTypeVersion="10" ma:contentTypeDescription="Create a new document." ma:contentTypeScope="" ma:versionID="e39e7e9e36de66d473ce04bb4ab2dbb8">
   <xsd:schema xmlns:xsd="http://www.w3.org/2001/XMLSchema" xmlns:xs="http://www.w3.org/2001/XMLSchema" xmlns:p="http://schemas.microsoft.com/office/2006/metadata/properties" xmlns:ns2="71af3243-3dd4-4a8d-8c0d-dd76da1f02a5" xmlns:ns3="16c05727-aa75-4e4a-9b5f-8a80a1165891" targetNamespace="http://schemas.microsoft.com/office/2006/metadata/properties" ma:root="true" ma:fieldsID="19dc5994665da46609c24125788630d8" ns2:_="" ns3:_="">
     <xsd:import namespace="71af3243-3dd4-4a8d-8c0d-dd76da1f02a5"/>
@@ -21760,6 +21749,14 @@
 </ct:contentTypeSchema>
 </file>
 
+<file path=customXml/item2.xml><?xml version="1.0" encoding="utf-8"?>
+<p:properties xmlns:p="http://schemas.microsoft.com/office/2006/metadata/properties" xmlns:xsi="http://www.w3.org/2001/XMLSchema-instance" xmlns:pc="http://schemas.microsoft.com/office/infopath/2007/PartnerControls">
+  <documentManagement>
+    <MediaServiceKeyPoints xmlns="71af3243-3dd4-4a8d-8c0d-dd76da1f02a5" xsi:nil="true"/>
+  </documentManagement>
+</p:properties>
+</file>
+
 <file path=customXml/item3.xml><?xml version="1.0" encoding="utf-8"?>
 <?mso-contentType ?>
 <FormTemplates xmlns="http://schemas.microsoft.com/sharepoint/v3/contenttype/forms">
@@ -21770,16 +21767,6 @@
 </file>
 
 <file path=customXml/itemProps1.xml><?xml version="1.0" encoding="utf-8"?>
-<ds:datastoreItem xmlns:ds="http://schemas.openxmlformats.org/officeDocument/2006/customXml" ds:itemID="{2519797F-2510-4681-A59B-FCD8F3733FE0}">
-  <ds:schemaRefs>
-    <ds:schemaRef ds:uri="http://schemas.microsoft.com/office/2006/metadata/properties"/>
-    <ds:schemaRef ds:uri="http://schemas.microsoft.com/office/infopath/2007/PartnerControls"/>
-    <ds:schemaRef ds:uri="71af3243-3dd4-4a8d-8c0d-dd76da1f02a5"/>
-  </ds:schemaRefs>
-</ds:datastoreItem>
-</file>
-
-<file path=customXml/itemProps2.xml><?xml version="1.0" encoding="utf-8"?>
 <ds:datastoreItem xmlns:ds="http://schemas.openxmlformats.org/officeDocument/2006/customXml" ds:itemID="{1FF4E1AF-DB5E-4764-961C-6F82B33E9E6E}">
   <ds:schemaRefs>
     <ds:schemaRef ds:uri="http://schemas.microsoft.com/office/2006/metadata/contentType"/>
@@ -21798,6 +21785,16 @@
 </ds:datastoreItem>
 </file>
 
+<file path=customXml/itemProps2.xml><?xml version="1.0" encoding="utf-8"?>
+<ds:datastoreItem xmlns:ds="http://schemas.openxmlformats.org/officeDocument/2006/customXml" ds:itemID="{2519797F-2510-4681-A59B-FCD8F3733FE0}">
+  <ds:schemaRefs>
+    <ds:schemaRef ds:uri="http://schemas.microsoft.com/office/2006/metadata/properties"/>
+    <ds:schemaRef ds:uri="http://schemas.microsoft.com/office/infopath/2007/PartnerControls"/>
+    <ds:schemaRef ds:uri="71af3243-3dd4-4a8d-8c0d-dd76da1f02a5"/>
+  </ds:schemaRefs>
+</ds:datastoreItem>
+</file>
+
 <file path=customXml/itemProps3.xml><?xml version="1.0" encoding="utf-8"?>
 <ds:datastoreItem xmlns:ds="http://schemas.openxmlformats.org/officeDocument/2006/customXml" ds:itemID="{A4C31332-3081-4BD9-AD6F-078B4521F357}">
   <ds:schemaRefs>
